--- a/docs/submission/NorthStar-Presentation.pptx
+++ b/docs/submission/NorthStar-Presentation.pptx
@@ -583,7 +583,7 @@
           <a:lstStyle/>
           <a:p>
             <a:r>
-              <a:t>[0:20-1:20] Lead with the proof, not the premise.</a:t>
+              <a:t>[0:20-1:10] Lead with the proof, not the premise.</a:t>
             </a:r>
           </a:p>
           <a:p>
@@ -658,7 +658,7 @@
           <a:lstStyle/>
           <a:p>
             <a:r>
-              <a:t>[1:20-2:05] The one-sentence architecture.</a:t>
+              <a:t>[1:10-1:55] The one-sentence architecture. The screenshot is the point - let them look.</a:t>
             </a:r>
           </a:p>
           <a:p>
@@ -733,7 +733,7 @@
           <a:lstStyle/>
           <a:p>
             <a:r>
-              <a:t>[2:05-2:50] Pick two to say out loud; the slide carries the rest.</a:t>
+              <a:t>[1:55-2:25] Only 30 seconds. Say TWO of the four out loud - 1 and 3 land best - and let the slide carry the others.</a:t>
             </a:r>
           </a:p>
           <a:p>
@@ -808,17 +808,27 @@
           <a:lstStyle/>
           <a:p>
             <a:r>
-              <a:t>[2:50-4:15] Longest block. Pre-load the app; do not set up on stage.</a:t>
-            </a:r>
-          </a:p>
-          <a:p>
-            <a:r>
-              <a:t>Have the recorded backup ready. If time runs short, cut steps 2 and 6 and keep the research-runs-itself moment and the recommendation changing - that is the story.</a:t>
-            </a:r>
-          </a:p>
-          <a:p>
-            <a:r>
-              <a:t>The Wildwood note is a genuine find, worth 15 seconds: proof the automation works when nobody is watching.</a:t>
+              <a:t>[2:25-4:15] The longest block - 110 seconds. Pre-load the app; do not set up on stage, and have the recorded backup queued.</a:t>
+            </a:r>
+          </a:p>
+          <a:p>
+            <a:r>
+              <a:t>Say the before/after out loud: before research the model assumed short-term rental income; after, the app flags it unavailable, policy risk goes medium to HIGH, and high-attention risks go from two to five.</a:t>
+            </a:r>
+          </a:p>
+          <a:p>
+            <a:r>
+              <a:t>Do NOT say research flipped the recommendation - on this property it was already Reject on cash flow. The honest claim is that the reasoning changed, and on a marginal deal it would flip the decision.</a:t>
+            </a:r>
+          </a:p>
+          <a:p>
+            <a:r>
+              <a:t>If time is short, cut the Policy Brief step and keep the research-runs-itself moment.</a:t>
+            </a:r>
+          </a:p>
+          <a:p>
+            <a:r>
+              <a:t>Worth 15 seconds if it fits: a note in our repo for Wildwood 63038 was researched by the app unattended, 20 official citations, nobody triggered it by hand.</a:t>
             </a:r>
           </a:p>
         </p:txBody>
@@ -888,7 +898,7 @@
           <a:lstStyle/>
           <a:p>
             <a:r>
-              <a:t>[4:15-4:40] Do not read the cards; point at them.</a:t>
+              <a:t>[4:15-4:45] Do not read the cards; point at them.</a:t>
             </a:r>
           </a:p>
           <a:p>
@@ -963,7 +973,7 @@
           <a:lstStyle/>
           <a:p>
             <a:r>
-              <a:t>[4:40-5:00] Close on the lesson, not a summary.</a:t>
+              <a:t>[4:45-5:00] Close on the lesson, not a summary.</a:t>
             </a:r>
           </a:p>
           <a:p>
@@ -4074,7 +4084,7 @@
           <a:p>
             <a:pPr>
               <a:spcAft>
-                <a:spcPts val="2000"/>
+                <a:spcPts val="2200"/>
               </a:spcAft>
             </a:pPr>
             <a:r>
@@ -4090,17 +4100,33 @@
           <a:p>
             <a:pPr>
               <a:spcAft>
+                <a:spcPts val="600"/>
+              </a:spcAft>
+            </a:pPr>
+            <a:r>
+              <a:rPr sz="2200" b="1">
+                <a:solidFill>
+                  <a:srgbClr val="FFFFFF"/>
+                </a:solidFill>
+                <a:latin typeface="Segoe UI"/>
+              </a:rPr>
+              <a:t>“Should I buy this property?”</a:t>
+            </a:r>
+          </a:p>
+          <a:p>
+            <a:pPr>
+              <a:spcAft>
                 <a:spcPts val="2600"/>
               </a:spcAft>
             </a:pPr>
             <a:r>
               <a:rPr sz="1700" b="0">
                 <a:solidFill>
-                  <a:srgbClr val="FFFFFF"/>
-                </a:solidFill>
-                <a:latin typeface="Segoe UI"/>
-              </a:rPr>
-              <a:t>Deterministic financial analysis, joined to AI policy research that keeps itself current.</a:t>
+                  <a:srgbClr val="EAF3F0"/>
+                </a:solidFill>
+                <a:latin typeface="Segoe UI"/>
+              </a:rPr>
+              <a:t>Answered with auditable numbers and current local rules.</a:t>
             </a:r>
           </a:p>
           <a:p>
@@ -4711,7 +4737,7 @@
                 </a:solidFill>
                 <a:latin typeface="Segoe UI"/>
               </a:rPr>
-              <a:t>One report, two layers that never mix</a:t>
+              <a:t>Two layers that never mix</a:t>
             </a:r>
           </a:p>
         </p:txBody>
@@ -4724,8 +4750,8 @@
         </p:nvSpPr>
         <p:spPr>
           <a:xfrm>
-            <a:off x="594360" y="1463040"/>
-            <a:ext cx="5394960" cy="4206240"/>
+            <a:off x="594360" y="1554480"/>
+            <a:ext cx="5029200" cy="4206240"/>
           </a:xfrm>
           <a:prstGeom prst="rect">
             <a:avLst/>
@@ -4740,231 +4766,166 @@
           <a:p>
             <a:pPr>
               <a:spcAft>
-                <a:spcPts val="300"/>
+                <a:spcPts val="200"/>
+              </a:spcAft>
+            </a:pPr>
+            <a:r>
+              <a:rPr sz="1900" b="1">
+                <a:solidFill>
+                  <a:srgbClr val="1D5C4D"/>
+                </a:solidFill>
+                <a:latin typeface="Segoe UI"/>
+              </a:rPr>
+              <a:t>1 · The math</a:t>
+            </a:r>
+          </a:p>
+          <a:p>
+            <a:pPr>
+              <a:spcAft>
+                <a:spcPts val="1600"/>
+              </a:spcAft>
+            </a:pPr>
+            <a:r>
+              <a:rPr sz="1500" b="0">
+                <a:solidFill>
+                  <a:srgbClr val="5B6B7C"/>
+                </a:solidFill>
+                <a:latin typeface="Segoe UI"/>
+              </a:rPr>
+              <a:t>Plain Python. Unit-tested. No model touches a number.</a:t>
+            </a:r>
+          </a:p>
+          <a:p>
+            <a:pPr>
+              <a:spcAft>
+                <a:spcPts val="200"/>
+              </a:spcAft>
+            </a:pPr>
+            <a:r>
+              <a:rPr sz="1900" b="1">
+                <a:solidFill>
+                  <a:srgbClr val="1D5C4D"/>
+                </a:solidFill>
+                <a:latin typeface="Segoe UI"/>
+              </a:rPr>
+              <a:t>2 · The rules</a:t>
+            </a:r>
+          </a:p>
+          <a:p>
+            <a:pPr>
+              <a:spcAft>
+                <a:spcPts val="1600"/>
+              </a:spcAft>
+            </a:pPr>
+            <a:r>
+              <a:rPr sz="1500" b="0">
+                <a:solidFill>
+                  <a:srgbClr val="5B6B7C"/>
+                </a:solidFill>
+                <a:latin typeface="Segoe UI"/>
+              </a:rPr>
+              <a:t>An Agent Skill researches local law with live web search</a:t>
+            </a:r>
+            <a:br/>
+            <a:r>
+              <a:rPr sz="1500" b="0">
+                <a:solidFill>
+                  <a:srgbClr val="5B6B7C"/>
+                </a:solidFill>
+                <a:latin typeface="Segoe UI"/>
+              </a:rPr>
+              <a:t>and cites every source.</a:t>
+            </a:r>
+          </a:p>
+          <a:p>
+            <a:pPr>
+              <a:spcAft>
+                <a:spcPts val="200"/>
+              </a:spcAft>
+            </a:pPr>
+            <a:r>
+              <a:rPr sz="1900" b="1">
+                <a:solidFill>
+                  <a:srgbClr val="1F2733"/>
+                </a:solidFill>
+                <a:latin typeface="Segoe UI"/>
+              </a:rPr>
+              <a:t>They meet at the decision</a:t>
+            </a:r>
+          </a:p>
+          <a:p>
+            <a:pPr>
+              <a:spcAft>
+                <a:spcPts val="1400"/>
+              </a:spcAft>
+            </a:pPr>
+            <a:r>
+              <a:rPr sz="1500" b="0">
+                <a:solidFill>
+                  <a:srgbClr val="5B6B7C"/>
+                </a:solidFill>
+                <a:latin typeface="Segoe UI"/>
+              </a:rPr>
+              <a:t>Findings become risk flags, diligence items,</a:t>
+            </a:r>
+            <a:br/>
+            <a:r>
+              <a:rPr sz="1500" b="0">
+                <a:solidFill>
+                  <a:srgbClr val="5B6B7C"/>
+                </a:solidFill>
+                <a:latin typeface="Segoe UI"/>
+              </a:rPr>
+              <a:t>and conflicts with your own assumptions.</a:t>
+            </a:r>
+          </a:p>
+          <a:p>
+            <a:pPr>
+              <a:spcAft>
+                <a:spcPts val="0"/>
               </a:spcAft>
             </a:pPr>
             <a:r>
               <a:rPr sz="1500" b="1">
                 <a:solidFill>
-                  <a:srgbClr val="1F2733"/>
-                </a:solidFill>
-                <a:latin typeface="Segoe UI"/>
-              </a:rPr>
-              <a:t>Layer 1 - the math.  </a:t>
-            </a:r>
-            <a:r>
-              <a:rPr sz="1500">
-                <a:solidFill>
-                  <a:srgbClr val="5B6B7C"/>
-                </a:solidFill>
-                <a:latin typeface="Segoe UI"/>
-              </a:rPr>
-              <a:t>NOI, DSCR, IRR, cap rate, equity multiple. Plain Python, unit-tested, never generated by a model. Every number is auditable.</a:t>
-            </a:r>
-          </a:p>
-          <a:p>
-            <a:pPr>
-              <a:spcAft>
-                <a:spcPts val="300"/>
-              </a:spcAft>
-            </a:pPr>
-            <a:r>
-              <a:rPr sz="1500" b="1">
-                <a:solidFill>
-                  <a:srgbClr val="1F2733"/>
-                </a:solidFill>
-                <a:latin typeface="Segoe UI"/>
-              </a:rPr>
-              <a:t>Layer 2 - the rules.  </a:t>
-            </a:r>
-            <a:r>
-              <a:rPr sz="1500">
-                <a:solidFill>
-                  <a:srgbClr val="5B6B7C"/>
-                </a:solidFill>
-                <a:latin typeface="Segoe UI"/>
-              </a:rPr>
-              <a:t>An Agent Skill researches STR ordinances, landlord-tenant law, rent control, and HOA authority with live web search, then writes a source-cited note into the knowledge bank.</a:t>
-            </a:r>
-          </a:p>
-          <a:p>
-            <a:pPr>
-              <a:spcAft>
-                <a:spcPts val="300"/>
-              </a:spcAft>
-            </a:pPr>
-            <a:r>
-              <a:rPr sz="1500" b="1">
-                <a:solidFill>
-                  <a:srgbClr val="1F2733"/>
-                </a:solidFill>
-                <a:latin typeface="Segoe UI"/>
-              </a:rPr>
-              <a:t>They meet at the decision.  </a:t>
-            </a:r>
-            <a:r>
-              <a:rPr sz="1500">
-                <a:solidFill>
-                  <a:srgbClr val="5B6B7C"/>
-                </a:solidFill>
-                <a:latin typeface="Segoe UI"/>
-              </a:rPr>
-              <a:t>Researched findings become risk flags, a diligence checklist, and assumption conflicts - the app tells you when your own rent-growth input exceeds a legal cap.</a:t>
-            </a:r>
-          </a:p>
-        </p:txBody>
-      </p:sp>
-      <p:sp>
-        <p:nvSpPr>
-          <p:cNvPr id="5" name="TextBox 4"/>
-          <p:cNvSpPr txBox="1"/>
+                  <a:srgbClr val="B3261E"/>
+                </a:solidFill>
+                <a:latin typeface="Segoe UI"/>
+              </a:rPr>
+              <a:t>Research never blocks the report.</a:t>
+            </a:r>
+          </a:p>
+        </p:txBody>
+      </p:sp>
+      <p:pic>
+        <p:nvPicPr>
+          <p:cNvPr id="5" name="Picture 4" descr="02-investor-report.png"/>
+          <p:cNvPicPr>
+            <a:picLocks noChangeAspect="1"/>
+          </p:cNvPicPr>
           <p:nvPr/>
-        </p:nvSpPr>
+        </p:nvPicPr>
+        <p:blipFill>
+          <a:blip r:embed="rId2"/>
+          <a:stretch>
+            <a:fillRect/>
+          </a:stretch>
+        </p:blipFill>
         <p:spPr>
           <a:xfrm>
-            <a:off x="6355080" y="1463040"/>
-            <a:ext cx="5257800" cy="4206240"/>
+            <a:off x="5989320" y="1234440"/>
+            <a:ext cx="5623560" cy="5744065"/>
           </a:xfrm>
           <a:prstGeom prst="rect">
             <a:avLst/>
           </a:prstGeom>
-          <a:noFill/>
+          <a:ln w="9525">
+            <a:solidFill>
+              <a:srgbClr val="D9E0E7"/>
+            </a:solidFill>
+          </a:ln>
         </p:spPr>
-        <p:txBody>
-          <a:bodyPr wrap="square">
-            <a:spAutoFit/>
-          </a:bodyPr>
-          <a:lstStyle/>
-          <a:p>
-            <a:pPr>
-              <a:spcAft>
-                <a:spcPts val="600"/>
-              </a:spcAft>
-            </a:pPr>
-            <a:r>
-              <a:rPr sz="1400" b="1">
-                <a:solidFill>
-                  <a:srgbClr val="1F2733"/>
-                </a:solidFill>
-                <a:latin typeface="Segoe UI"/>
-              </a:rPr>
-              <a:t>Enter address + assumptions</a:t>
-            </a:r>
-          </a:p>
-          <a:p>
-            <a:pPr>
-              <a:spcAft>
-                <a:spcPts val="700"/>
-              </a:spcAft>
-            </a:pPr>
-            <a:r>
-              <a:rPr sz="1300" b="0">
-                <a:solidFill>
-                  <a:srgbClr val="5B6B7C"/>
-                </a:solidFill>
-                <a:latin typeface="Segoe UI"/>
-              </a:rPr>
-              <a:t>↓  Report renders immediately (offline, deterministic)</a:t>
-            </a:r>
-          </a:p>
-          <a:p>
-            <a:pPr>
-              <a:spcAft>
-                <a:spcPts val="700"/>
-              </a:spcAft>
-            </a:pPr>
-            <a:r>
-              <a:rPr sz="1300" b="0">
-                <a:solidFill>
-                  <a:srgbClr val="5B6B7C"/>
-                </a:solidFill>
-                <a:latin typeface="Segoe UI"/>
-              </a:rPr>
-              <a:t>↓  No policy note for this ZIP?  research starts itself</a:t>
-            </a:r>
-          </a:p>
-          <a:p>
-            <a:pPr>
-              <a:spcAft>
-                <a:spcPts val="700"/>
-              </a:spcAft>
-            </a:pPr>
-            <a:r>
-              <a:rPr sz="1300" b="0">
-                <a:solidFill>
-                  <a:srgbClr val="5B6B7C"/>
-                </a:solidFill>
-                <a:latin typeface="Segoe UI"/>
-              </a:rPr>
-              <a:t>↓  Agent runs the Skill with live web search</a:t>
-            </a:r>
-          </a:p>
-          <a:p>
-            <a:pPr>
-              <a:spcAft>
-                <a:spcPts val="700"/>
-              </a:spcAft>
-            </a:pPr>
-            <a:r>
-              <a:rPr sz="1300" b="0">
-                <a:solidFill>
-                  <a:srgbClr val="5B6B7C"/>
-                </a:solidFill>
-                <a:latin typeface="Segoe UI"/>
-              </a:rPr>
-              <a:t>↓  Cited note saved to researched/zips/&lt;zip&gt;/</a:t>
-            </a:r>
-          </a:p>
-          <a:p>
-            <a:pPr>
-              <a:spcAft>
-                <a:spcPts val="700"/>
-              </a:spcAft>
-            </a:pPr>
-            <a:r>
-              <a:rPr sz="1300" b="0">
-                <a:solidFill>
-                  <a:srgbClr val="5B6B7C"/>
-                </a:solidFill>
-                <a:latin typeface="Segoe UI"/>
-              </a:rPr>
-              <a:t>↓  Next run: flags, conflicts, and risk update</a:t>
-            </a:r>
-          </a:p>
-          <a:p>
-            <a:pPr>
-              <a:spcAft>
-                <a:spcPts val="200"/>
-              </a:spcAft>
-            </a:pPr>
-            <a:r>
-              <a:rPr sz="1300" b="1">
-                <a:solidFill>
-                  <a:srgbClr val="1D5C4D"/>
-                </a:solidFill>
-                <a:latin typeface="Segoe UI"/>
-              </a:rPr>
-              <a:t>Research never blocks the report.</a:t>
-            </a:r>
-          </a:p>
-          <a:p>
-            <a:pPr>
-              <a:spcAft>
-                <a:spcPts val="0"/>
-              </a:spcAft>
-            </a:pPr>
-            <a:r>
-              <a:rPr sz="1200" b="0">
-                <a:solidFill>
-                  <a:srgbClr val="5B6B7C"/>
-                </a:solidFill>
-                <a:latin typeface="Segoe UI"/>
-              </a:rPr>
-              <a:t>No agent, no internet, or a reply that is not a policy note: nothing is saved and the app falls back to a copy-paste prompt. It degrades, never guesses.</a:t>
-            </a:r>
-          </a:p>
-        </p:txBody>
-      </p:sp>
+      </p:pic>
     </p:spTree>
   </p:cSld>
   <p:clrMapOvr>
@@ -5090,8 +5051,8 @@
         </p:nvSpPr>
         <p:spPr>
           <a:xfrm>
-            <a:off x="594360" y="1481328"/>
-            <a:ext cx="11002975" cy="4572000"/>
+            <a:off x="594360" y="1581912"/>
+            <a:ext cx="640080" cy="731520"/>
           </a:xfrm>
           <a:prstGeom prst="rect">
             <a:avLst/>
@@ -5106,101 +5067,354 @@
           <a:p>
             <a:pPr>
               <a:spcAft>
-                <a:spcPts val="300"/>
-              </a:spcAft>
-            </a:pPr>
-            <a:r>
-              <a:rPr sz="1450" b="1">
+                <a:spcPts val="0"/>
+              </a:spcAft>
+            </a:pPr>
+            <a:r>
+              <a:rPr sz="3400" b="1">
+                <a:solidFill>
+                  <a:srgbClr val="9CC0B4"/>
+                </a:solidFill>
+                <a:latin typeface="Segoe UI"/>
+              </a:rPr>
+              <a:t>1</a:t>
+            </a:r>
+          </a:p>
+        </p:txBody>
+      </p:sp>
+      <p:sp>
+        <p:nvSpPr>
+          <p:cNvPr id="5" name="TextBox 4"/>
+          <p:cNvSpPr txBox="1"/>
+          <p:nvPr/>
+        </p:nvSpPr>
+        <p:spPr>
+          <a:xfrm>
+            <a:off x="1234440" y="1691640"/>
+            <a:ext cx="10362895" cy="1005840"/>
+          </a:xfrm>
+          <a:prstGeom prst="rect">
+            <a:avLst/>
+          </a:prstGeom>
+          <a:noFill/>
+        </p:spPr>
+        <p:txBody>
+          <a:bodyPr wrap="square">
+            <a:spAutoFit/>
+          </a:bodyPr>
+          <a:lstStyle/>
+          <a:p>
+            <a:pPr>
+              <a:spcAft>
+                <a:spcPts val="100"/>
+              </a:spcAft>
+            </a:pPr>
+            <a:r>
+              <a:rPr sz="2000" b="1">
                 <a:solidFill>
                   <a:srgbClr val="1F2733"/>
                 </a:solidFill>
                 <a:latin typeface="Segoe UI"/>
               </a:rPr>
-              <a:t>1 · Keep the LLM out of the arithmetic.  </a:t>
-            </a:r>
-            <a:r>
-              <a:rPr sz="1450">
+              <a:t>Keep the LLM out of the arithmetic</a:t>
+            </a:r>
+          </a:p>
+          <a:p>
+            <a:pPr>
+              <a:spcAft>
+                <a:spcPts val="0"/>
+              </a:spcAft>
+            </a:pPr>
+            <a:r>
+              <a:rPr sz="1400" b="0">
                 <a:solidFill>
                   <a:srgbClr val="5B6B7C"/>
                 </a:solidFill>
                 <a:latin typeface="Segoe UI"/>
               </a:rPr>
-              <a:t>Financial results must be reproducible and checkable. Determinism is the feature; the AI is scoped to research, where it adds real value.</a:t>
-            </a:r>
-          </a:p>
+              <a:t>A hallucinated IRR is worse than none</a:t>
+            </a:r>
+          </a:p>
+        </p:txBody>
+      </p:sp>
+      <p:sp>
+        <p:nvSpPr>
+          <p:cNvPr id="6" name="TextBox 5"/>
+          <p:cNvSpPr txBox="1"/>
+          <p:nvPr/>
+        </p:nvSpPr>
+        <p:spPr>
+          <a:xfrm>
+            <a:off x="594360" y="2752344"/>
+            <a:ext cx="640080" cy="731520"/>
+          </a:xfrm>
+          <a:prstGeom prst="rect">
+            <a:avLst/>
+          </a:prstGeom>
+          <a:noFill/>
+        </p:spPr>
+        <p:txBody>
+          <a:bodyPr wrap="square">
+            <a:spAutoFit/>
+          </a:bodyPr>
+          <a:lstStyle/>
           <a:p>
             <a:pPr>
               <a:spcAft>
-                <a:spcPts val="300"/>
-              </a:spcAft>
-            </a:pPr>
-            <a:r>
-              <a:rPr sz="1450" b="1">
+                <a:spcPts val="0"/>
+              </a:spcAft>
+            </a:pPr>
+            <a:r>
+              <a:rPr sz="3400" b="1">
+                <a:solidFill>
+                  <a:srgbClr val="9CC0B4"/>
+                </a:solidFill>
+                <a:latin typeface="Segoe UI"/>
+              </a:rPr>
+              <a:t>2</a:t>
+            </a:r>
+          </a:p>
+        </p:txBody>
+      </p:sp>
+      <p:sp>
+        <p:nvSpPr>
+          <p:cNvPr id="7" name="TextBox 6"/>
+          <p:cNvSpPr txBox="1"/>
+          <p:nvPr/>
+        </p:nvSpPr>
+        <p:spPr>
+          <a:xfrm>
+            <a:off x="1234440" y="2862072"/>
+            <a:ext cx="10362895" cy="1005840"/>
+          </a:xfrm>
+          <a:prstGeom prst="rect">
+            <a:avLst/>
+          </a:prstGeom>
+          <a:noFill/>
+        </p:spPr>
+        <p:txBody>
+          <a:bodyPr wrap="square">
+            <a:spAutoFit/>
+          </a:bodyPr>
+          <a:lstStyle/>
+          <a:p>
+            <a:pPr>
+              <a:spcAft>
+                <a:spcPts val="100"/>
+              </a:spcAft>
+            </a:pPr>
+            <a:r>
+              <a:rPr sz="2000" b="1">
                 <a:solidFill>
                   <a:srgbClr val="1F2733"/>
                 </a:solidFill>
                 <a:latin typeface="Segoe UI"/>
               </a:rPr>
-              <a:t>2 · Make provenance structural, not a label.  </a:t>
-            </a:r>
-            <a:r>
-              <a:rPr sz="1450">
+              <a:t>Provenance enforced in code</a:t>
+            </a:r>
+          </a:p>
+          <a:p>
+            <a:pPr>
+              <a:spcAft>
+                <a:spcPts val="0"/>
+              </a:spcAft>
+            </a:pPr>
+            <a:r>
+              <a:rPr sz="1400" b="0">
                 <a:solidFill>
                   <a:srgbClr val="5B6B7C"/>
                 </a:solidFill>
                 <a:latin typeface="Segoe UI"/>
               </a:rPr>
-              <a:t>researched/ is written only by the Skill, user/ only by people - enforced in code, so the in-app form physically cannot write an AI-labelled note. Every finding names its file.</a:t>
-            </a:r>
-          </a:p>
+              <a:t>AI-written and human-written notes cannot mix</a:t>
+            </a:r>
+          </a:p>
+        </p:txBody>
+      </p:sp>
+      <p:sp>
+        <p:nvSpPr>
+          <p:cNvPr id="8" name="TextBox 7"/>
+          <p:cNvSpPr txBox="1"/>
+          <p:nvPr/>
+        </p:nvSpPr>
+        <p:spPr>
+          <a:xfrm>
+            <a:off x="594360" y="3922776"/>
+            <a:ext cx="640080" cy="731520"/>
+          </a:xfrm>
+          <a:prstGeom prst="rect">
+            <a:avLst/>
+          </a:prstGeom>
+          <a:noFill/>
+        </p:spPr>
+        <p:txBody>
+          <a:bodyPr wrap="square">
+            <a:spAutoFit/>
+          </a:bodyPr>
+          <a:lstStyle/>
           <a:p>
             <a:pPr>
               <a:spcAft>
-                <a:spcPts val="300"/>
-              </a:spcAft>
-            </a:pPr>
-            <a:r>
-              <a:rPr sz="1450" b="1">
+                <a:spcPts val="0"/>
+              </a:spcAft>
+            </a:pPr>
+            <a:r>
+              <a:rPr sz="3400" b="1">
+                <a:solidFill>
+                  <a:srgbClr val="9CC0B4"/>
+                </a:solidFill>
+                <a:latin typeface="Segoe UI"/>
+              </a:rPr>
+              <a:t>3</a:t>
+            </a:r>
+          </a:p>
+        </p:txBody>
+      </p:sp>
+      <p:sp>
+        <p:nvSpPr>
+          <p:cNvPr id="9" name="TextBox 8"/>
+          <p:cNvSpPr txBox="1"/>
+          <p:nvPr/>
+        </p:nvSpPr>
+        <p:spPr>
+          <a:xfrm>
+            <a:off x="1234440" y="4032504"/>
+            <a:ext cx="10362895" cy="1005840"/>
+          </a:xfrm>
+          <a:prstGeom prst="rect">
+            <a:avLst/>
+          </a:prstGeom>
+          <a:noFill/>
+        </p:spPr>
+        <p:txBody>
+          <a:bodyPr wrap="square">
+            <a:spAutoFit/>
+          </a:bodyPr>
+          <a:lstStyle/>
+          <a:p>
+            <a:pPr>
+              <a:spcAft>
+                <a:spcPts val="100"/>
+              </a:spcAft>
+            </a:pPr>
+            <a:r>
+              <a:rPr sz="2000" b="1">
                 <a:solidFill>
                   <a:srgbClr val="1F2733"/>
                 </a:solidFill>
                 <a:latin typeface="Segoe UI"/>
               </a:rPr>
-              <a:t>3 · Delegate to an agent the user already signed into.  </a:t>
-            </a:r>
-            <a:r>
-              <a:rPr sz="1450">
+              <a:t>Use the agent the user already signed into</a:t>
+            </a:r>
+          </a:p>
+          <a:p>
+            <a:pPr>
+              <a:spcAft>
+                <a:spcPts val="0"/>
+              </a:spcAft>
+            </a:pPr>
+            <a:r>
+              <a:rPr sz="1400" b="0">
                 <a:solidFill>
                   <a:srgbClr val="5B6B7C"/>
                 </a:solidFill>
                 <a:latin typeface="Segoe UI"/>
               </a:rPr>
-              <a:t>Research runs through the codex or claude CLI on PATH, which brings its own login and web search. Zero credential setup, and no API key stored in the project. An Anthropic API key is the fallback, not the requirement.</a:t>
-            </a:r>
-          </a:p>
+              <a:t>Zero credential setup, no key stored</a:t>
+            </a:r>
+          </a:p>
+        </p:txBody>
+      </p:sp>
+      <p:sp>
+        <p:nvSpPr>
+          <p:cNvPr id="10" name="TextBox 9"/>
+          <p:cNvSpPr txBox="1"/>
+          <p:nvPr/>
+        </p:nvSpPr>
+        <p:spPr>
+          <a:xfrm>
+            <a:off x="594360" y="5093208"/>
+            <a:ext cx="640080" cy="731520"/>
+          </a:xfrm>
+          <a:prstGeom prst="rect">
+            <a:avLst/>
+          </a:prstGeom>
+          <a:noFill/>
+        </p:spPr>
+        <p:txBody>
+          <a:bodyPr wrap="square">
+            <a:spAutoFit/>
+          </a:bodyPr>
+          <a:lstStyle/>
           <a:p>
             <a:pPr>
               <a:spcAft>
-                <a:spcPts val="300"/>
-              </a:spcAft>
-            </a:pPr>
-            <a:r>
-              <a:rPr sz="1450" b="1">
+                <a:spcPts val="0"/>
+              </a:spcAft>
+            </a:pPr>
+            <a:r>
+              <a:rPr sz="3400" b="1">
+                <a:solidFill>
+                  <a:srgbClr val="9CC0B4"/>
+                </a:solidFill>
+                <a:latin typeface="Segoe UI"/>
+              </a:rPr>
+              <a:t>4</a:t>
+            </a:r>
+          </a:p>
+        </p:txBody>
+      </p:sp>
+      <p:sp>
+        <p:nvSpPr>
+          <p:cNvPr id="11" name="TextBox 10"/>
+          <p:cNvSpPr txBox="1"/>
+          <p:nvPr/>
+        </p:nvSpPr>
+        <p:spPr>
+          <a:xfrm>
+            <a:off x="1234440" y="5202936"/>
+            <a:ext cx="10362895" cy="1005840"/>
+          </a:xfrm>
+          <a:prstGeom prst="rect">
+            <a:avLst/>
+          </a:prstGeom>
+          <a:noFill/>
+        </p:spPr>
+        <p:txBody>
+          <a:bodyPr wrap="square">
+            <a:spAutoFit/>
+          </a:bodyPr>
+          <a:lstStyle/>
+          <a:p>
+            <a:pPr>
+              <a:spcAft>
+                <a:spcPts val="100"/>
+              </a:spcAft>
+            </a:pPr>
+            <a:r>
+              <a:rPr sz="2000" b="1">
                 <a:solidFill>
                   <a:srgbClr val="1F2733"/>
                 </a:solidFill>
                 <a:latin typeface="Segoe UI"/>
               </a:rPr>
-              <a:t>4 · State missing data; never fill the gap.  </a:t>
-            </a:r>
-            <a:r>
-              <a:rPr sz="1450">
+              <a:t>State missing data, never fill the gap</a:t>
+            </a:r>
+          </a:p>
+          <a:p>
+            <a:pPr>
+              <a:spcAft>
+                <a:spcPts val="0"/>
+              </a:spcAft>
+            </a:pPr>
+            <a:r>
+              <a:rPr sz="1400" b="0">
                 <a:solidFill>
                   <a:srgbClr val="5B6B7C"/>
                 </a:solidFill>
                 <a:latin typeface="Segoe UI"/>
               </a:rPr>
-              <a:t>ZIP misses fall back to state, then national, and say which. Blocked government pages are tagged 'confirm with the agency' rather than quietly replaced with a blog.</a:t>
+              <a:t>“Confirm with the agency”, not a blog</a:t>
             </a:r>
           </a:p>
         </p:txBody>
@@ -5330,8 +5544,8 @@
         </p:nvSpPr>
         <p:spPr>
           <a:xfrm>
-            <a:off x="594360" y="1481328"/>
-            <a:ext cx="5943600" cy="4572000"/>
+            <a:off x="594360" y="1463040"/>
+            <a:ext cx="5486400" cy="1280160"/>
           </a:xfrm>
           <a:prstGeom prst="rect">
             <a:avLst/>
@@ -5346,165 +5560,245 @@
           <a:p>
             <a:pPr>
               <a:spcAft>
+                <a:spcPts val="800"/>
+              </a:spcAft>
+            </a:pPr>
+            <a:r>
+              <a:rPr sz="1700" b="1">
+                <a:solidFill>
+                  <a:srgbClr val="1F2733"/>
+                </a:solidFill>
+                <a:latin typeface="Segoe UI"/>
+              </a:rPr>
+              <a:t>Same property, before and after research</a:t>
+            </a:r>
+          </a:p>
+        </p:txBody>
+      </p:sp>
+      <p:sp>
+        <p:nvSpPr>
+          <p:cNvPr id="5" name="Rounded Rectangle 4"/>
+          <p:cNvSpPr/>
+          <p:nvPr/>
+        </p:nvSpPr>
+        <p:spPr>
+          <a:xfrm>
+            <a:off x="594360" y="2148840"/>
+            <a:ext cx="2651760" cy="1783080"/>
+          </a:xfrm>
+          <a:prstGeom prst="roundRect">
+            <a:avLst/>
+          </a:prstGeom>
+          <a:solidFill>
+            <a:srgbClr val="FFFFFF"/>
+          </a:solidFill>
+          <a:ln>
+            <a:solidFill>
+              <a:srgbClr val="5B6B7C"/>
+            </a:solidFill>
+          </a:ln>
+          <a:effectLst/>
+        </p:spPr>
+        <p:style>
+          <a:lnRef idx="1">
+            <a:schemeClr val="accent1"/>
+          </a:lnRef>
+          <a:fillRef idx="3">
+            <a:schemeClr val="accent1"/>
+          </a:fillRef>
+          <a:effectRef idx="2">
+            <a:schemeClr val="accent1"/>
+          </a:effectRef>
+          <a:fontRef idx="minor">
+            <a:schemeClr val="lt1"/>
+          </a:fontRef>
+        </p:style>
+        <p:txBody>
+          <a:bodyPr rtlCol="0" anchor="ctr" wrap="square" lIns="164592"/>
+          <a:lstStyle/>
+          <a:p>
+            <a:pPr algn="l">
+              <a:spcAft>
+                <a:spcPts val="500"/>
+              </a:spcAft>
+            </a:pPr>
+            <a:r>
+              <a:rPr sz="1300" b="1">
+                <a:solidFill>
+                  <a:srgbClr val="5B6B7C"/>
+                </a:solidFill>
+                <a:latin typeface="Segoe UI"/>
+              </a:rPr>
+              <a:t>BEFORE</a:t>
+            </a:r>
+          </a:p>
+          <a:p>
+            <a:pPr algn="l">
+              <a:spcAft>
                 <a:spcPts val="300"/>
               </a:spcAft>
             </a:pPr>
             <a:r>
-              <a:rPr sz="1500" b="1">
+              <a:rPr sz="1300" b="0">
                 <a:solidFill>
                   <a:srgbClr val="1F2733"/>
                 </a:solidFill>
                 <a:latin typeface="Segoe UI"/>
               </a:rPr>
-              <a:t>1.  </a:t>
-            </a:r>
-            <a:r>
-              <a:rPr sz="1500">
-                <a:solidFill>
-                  <a:srgbClr val="5B6B7C"/>
-                </a:solidFill>
-                <a:latin typeface="Segoe UI"/>
-              </a:rPr>
-              <a:t>Analyze 745 Woodrun Dr, Ballwin MO - full investor report, instant.</a:t>
-            </a:r>
-          </a:p>
-          <a:p>
-            <a:pPr>
+              <a:t>STR income: assumed viable</a:t>
+            </a:r>
+          </a:p>
+          <a:p>
+            <a:pPr algn="l">
               <a:spcAft>
                 <a:spcPts val="300"/>
               </a:spcAft>
             </a:pPr>
             <a:r>
-              <a:rPr sz="1500" b="1">
+              <a:rPr sz="1300" b="0">
                 <a:solidFill>
                   <a:srgbClr val="1F2733"/>
                 </a:solidFill>
                 <a:latin typeface="Segoe UI"/>
               </a:rPr>
-              <a:t>2.  </a:t>
-            </a:r>
-            <a:r>
-              <a:rPr sz="1500">
-                <a:solidFill>
-                  <a:srgbClr val="5B6B7C"/>
-                </a:solidFill>
-                <a:latin typeface="Segoe UI"/>
-              </a:rPr>
-              <a:t>Address check catches a city/state/ZIP mismatch before it corrupts a result.</a:t>
-            </a:r>
-          </a:p>
-          <a:p>
-            <a:pPr>
+              <a:t>Policy risk:  medium</a:t>
+            </a:r>
+          </a:p>
+          <a:p>
+            <a:pPr algn="l">
               <a:spcAft>
                 <a:spcPts val="300"/>
               </a:spcAft>
             </a:pPr>
             <a:r>
-              <a:rPr sz="1500" b="1">
+              <a:rPr sz="1300" b="0">
                 <a:solidFill>
                   <a:srgbClr val="1F2733"/>
                 </a:solidFill>
                 <a:latin typeface="Segoe UI"/>
               </a:rPr>
-              <a:t>3.  </a:t>
-            </a:r>
-            <a:r>
-              <a:rPr sz="1500">
-                <a:solidFill>
-                  <a:srgbClr val="5B6B7C"/>
-                </a:solidFill>
-                <a:latin typeface="Segoe UI"/>
-              </a:rPr>
-              <a:t>Enter a ZIP with no note - research starts itself in the background.</a:t>
-            </a:r>
-          </a:p>
-          <a:p>
-            <a:pPr>
+              <a:t>2 high-attention risks</a:t>
+            </a:r>
+          </a:p>
+        </p:txBody>
+      </p:sp>
+      <p:sp>
+        <p:nvSpPr>
+          <p:cNvPr id="6" name="Rounded Rectangle 5"/>
+          <p:cNvSpPr/>
+          <p:nvPr/>
+        </p:nvSpPr>
+        <p:spPr>
+          <a:xfrm>
+            <a:off x="3474720" y="2148840"/>
+            <a:ext cx="2651760" cy="1783080"/>
+          </a:xfrm>
+          <a:prstGeom prst="roundRect">
+            <a:avLst/>
+          </a:prstGeom>
+          <a:solidFill>
+            <a:srgbClr val="FFFFFF"/>
+          </a:solidFill>
+          <a:ln>
+            <a:solidFill>
+              <a:srgbClr val="B3261E"/>
+            </a:solidFill>
+          </a:ln>
+          <a:effectLst/>
+        </p:spPr>
+        <p:style>
+          <a:lnRef idx="1">
+            <a:schemeClr val="accent1"/>
+          </a:lnRef>
+          <a:fillRef idx="3">
+            <a:schemeClr val="accent1"/>
+          </a:fillRef>
+          <a:effectRef idx="2">
+            <a:schemeClr val="accent1"/>
+          </a:effectRef>
+          <a:fontRef idx="minor">
+            <a:schemeClr val="lt1"/>
+          </a:fontRef>
+        </p:style>
+        <p:txBody>
+          <a:bodyPr rtlCol="0" anchor="ctr" wrap="square" lIns="164592"/>
+          <a:lstStyle/>
+          <a:p>
+            <a:pPr algn="l">
+              <a:spcAft>
+                <a:spcPts val="500"/>
+              </a:spcAft>
+            </a:pPr>
+            <a:r>
+              <a:rPr sz="1300" b="1">
+                <a:solidFill>
+                  <a:srgbClr val="B3261E"/>
+                </a:solidFill>
+                <a:latin typeface="Segoe UI"/>
+              </a:rPr>
+              <a:t>AFTER</a:t>
+            </a:r>
+          </a:p>
+          <a:p>
+            <a:pPr algn="l">
               <a:spcAft>
                 <a:spcPts val="300"/>
               </a:spcAft>
             </a:pPr>
             <a:r>
-              <a:rPr sz="1500" b="1">
+              <a:rPr sz="1300" b="0">
                 <a:solidFill>
                   <a:srgbClr val="1F2733"/>
                 </a:solidFill>
                 <a:latin typeface="Segoe UI"/>
               </a:rPr>
-              <a:t>4.  </a:t>
-            </a:r>
-            <a:r>
-              <a:rPr sz="1500">
-                <a:solidFill>
-                  <a:srgbClr val="5B6B7C"/>
-                </a:solidFill>
-                <a:latin typeface="Segoe UI"/>
-              </a:rPr>
-              <a:t>Open the saved note: every fact carries a source link, a date, and an official-vs-secondary tag.</a:t>
-            </a:r>
-          </a:p>
-          <a:p>
-            <a:pPr>
+              <a:t>STR income: unavailable</a:t>
+            </a:r>
+          </a:p>
+          <a:p>
+            <a:pPr algn="l">
               <a:spcAft>
                 <a:spcPts val="300"/>
               </a:spcAft>
             </a:pPr>
             <a:r>
-              <a:rPr sz="1500" b="1">
+              <a:rPr sz="1300" b="0">
                 <a:solidFill>
                   <a:srgbClr val="1F2733"/>
                 </a:solidFill>
                 <a:latin typeface="Segoe UI"/>
               </a:rPr>
-              <a:t>5.  </a:t>
-            </a:r>
-            <a:r>
-              <a:rPr sz="1500">
-                <a:solidFill>
-                  <a:srgbClr val="5B6B7C"/>
-                </a:solidFill>
-                <a:latin typeface="Segoe UI"/>
-              </a:rPr>
-              <a:t>Re-run: policy risk rises, STR income is flagged unavailable, the recommendation moves.</a:t>
-            </a:r>
-          </a:p>
-          <a:p>
-            <a:pPr>
+              <a:t>Policy risk:  HIGH</a:t>
+            </a:r>
+          </a:p>
+          <a:p>
+            <a:pPr algn="l">
               <a:spcAft>
                 <a:spcPts val="300"/>
               </a:spcAft>
             </a:pPr>
             <a:r>
-              <a:rPr sz="1500" b="1">
+              <a:rPr sz="1300" b="0">
                 <a:solidFill>
                   <a:srgbClr val="1F2733"/>
                 </a:solidFill>
                 <a:latin typeface="Segoe UI"/>
               </a:rPr>
-              <a:t>6.  </a:t>
-            </a:r>
-            <a:r>
-              <a:rPr sz="1500">
-                <a:solidFill>
-                  <a:srgbClr val="5B6B7C"/>
-                </a:solidFill>
-                <a:latin typeface="Segoe UI"/>
-              </a:rPr>
-              <a:t>One click: a printable Policy Brief to hand a client.</a:t>
-            </a:r>
-          </a:p>
-        </p:txBody>
-      </p:sp>
-      <p:sp>
-        <p:nvSpPr>
-          <p:cNvPr id="5" name="TextBox 4"/>
+              <a:t>5 high-attention risks</a:t>
+            </a:r>
+          </a:p>
+        </p:txBody>
+      </p:sp>
+      <p:sp>
+        <p:nvSpPr>
+          <p:cNvPr id="7" name="TextBox 6"/>
           <p:cNvSpPr txBox="1"/>
           <p:nvPr/>
         </p:nvSpPr>
         <p:spPr>
           <a:xfrm>
-            <a:off x="6858000" y="1600200"/>
-            <a:ext cx="4754880" cy="4206240"/>
+            <a:off x="594360" y="4160520"/>
+            <a:ext cx="5486400" cy="2194560"/>
           </a:xfrm>
           <a:prstGeom prst="rect">
             <a:avLst/>
@@ -5519,69 +5813,114 @@
           <a:p>
             <a:pPr>
               <a:spcAft>
-                <a:spcPts val="800"/>
-              </a:spcAft>
-            </a:pPr>
-            <a:r>
-              <a:rPr sz="1700" b="1">
+                <a:spcPts val="500"/>
+              </a:spcAft>
+            </a:pPr>
+            <a:r>
+              <a:rPr sz="1500" b="1">
                 <a:solidFill>
                   <a:srgbClr val="1D5C4D"/>
                 </a:solidFill>
                 <a:latin typeface="Segoe UI"/>
               </a:rPr>
-              <a:t>It already ran without us</a:t>
+              <a:t>Demo path</a:t>
             </a:r>
           </a:p>
           <a:p>
             <a:pPr>
               <a:spcAft>
-                <a:spcPts val="800"/>
+                <a:spcPts val="500"/>
               </a:spcAft>
             </a:pPr>
             <a:r>
               <a:rPr sz="1400" b="0">
                 <a:solidFill>
-                  <a:srgbClr val="1F2733"/>
-                </a:solidFill>
-                <a:latin typeface="Segoe UI"/>
-              </a:rPr>
-              <a:t>While preparing this deck we found a policy note in the repository that neither of us wrote by hand.</a:t>
+                  <a:srgbClr val="5B6B7C"/>
+                </a:solidFill>
+                <a:latin typeface="Segoe UI"/>
+              </a:rPr>
+              <a:t>Analyze  →  report is instant and complete</a:t>
             </a:r>
           </a:p>
           <a:p>
             <a:pPr>
               <a:spcAft>
-                <a:spcPts val="1000"/>
+                <a:spcPts val="500"/>
               </a:spcAft>
             </a:pPr>
             <a:r>
               <a:rPr sz="1400" b="0">
                 <a:solidFill>
-                  <a:srgbClr val="1F2733"/>
-                </a:solidFill>
-                <a:latin typeface="Segoe UI"/>
-              </a:rPr>
-              <a:t>A teammate analysed 17723 Mueller Rd, Wildwood MO 63038. The app researched the ZIP on its own and saved a note with 20 official citations.</a:t>
+                  <a:srgbClr val="5B6B7C"/>
+                </a:solidFill>
+                <a:latin typeface="Segoe UI"/>
+              </a:rPr>
+              <a:t>New ZIP  →  research starts itself, unprompted</a:t>
             </a:r>
           </a:p>
           <a:p>
             <a:pPr>
               <a:spcAft>
-                <a:spcPts val="0"/>
-              </a:spcAft>
-            </a:pPr>
-            <a:r>
-              <a:rPr sz="1400" b="1">
-                <a:solidFill>
-                  <a:srgbClr val="B3261E"/>
-                </a:solidFill>
-                <a:latin typeface="Segoe UI"/>
-              </a:rPr>
-              <a:t>That is the feature working unattended, not a scripted demo.</a:t>
-            </a:r>
-          </a:p>
-        </p:txBody>
-      </p:sp>
+                <a:spcPts val="500"/>
+              </a:spcAft>
+            </a:pPr>
+            <a:r>
+              <a:rPr sz="1400" b="0">
+                <a:solidFill>
+                  <a:srgbClr val="5B6B7C"/>
+                </a:solidFill>
+                <a:latin typeface="Segoe UI"/>
+              </a:rPr>
+              <a:t>Saved note  →  every fact sourced, dated, tagged</a:t>
+            </a:r>
+          </a:p>
+          <a:p>
+            <a:pPr>
+              <a:spcAft>
+                <a:spcPts val="500"/>
+              </a:spcAft>
+            </a:pPr>
+            <a:r>
+              <a:rPr sz="1400" b="0">
+                <a:solidFill>
+                  <a:srgbClr val="5B6B7C"/>
+                </a:solidFill>
+                <a:latin typeface="Segoe UI"/>
+              </a:rPr>
+              <a:t>One click  →  printable Policy Brief for a client</a:t>
+            </a:r>
+          </a:p>
+        </p:txBody>
+      </p:sp>
+      <p:pic>
+        <p:nvPicPr>
+          <p:cNvPr id="8" name="Picture 7" descr="04-policy-brief.png"/>
+          <p:cNvPicPr>
+            <a:picLocks noChangeAspect="1"/>
+          </p:cNvPicPr>
+          <p:nvPr/>
+        </p:nvPicPr>
+        <p:blipFill>
+          <a:blip r:embed="rId2"/>
+          <a:stretch>
+            <a:fillRect/>
+          </a:stretch>
+        </p:blipFill>
+        <p:spPr>
+          <a:xfrm>
+            <a:off x="6537960" y="1371600"/>
+            <a:ext cx="5074920" cy="4277433"/>
+          </a:xfrm>
+          <a:prstGeom prst="rect">
+            <a:avLst/>
+          </a:prstGeom>
+          <a:ln w="9525">
+            <a:solidFill>
+              <a:srgbClr val="D9E0E7"/>
+            </a:solidFill>
+          </a:ln>
+        </p:spPr>
+      </p:pic>
     </p:spTree>
   </p:cSld>
   <p:clrMapOvr>

--- a/docs/submission/NorthStar-Presentation.pptx
+++ b/docs/submission/NorthStar-Presentation.pptx
@@ -974,6 +974,11 @@
           <a:p>
             <a:r>
               <a:t>[4:45-5:00] Close on the lesson, not a summary.</a:t>
+            </a:r>
+          </a:p>
+          <a:p>
+            <a:r>
+              <a:t>If asked what you would build next, or about data sources, lead with the API item: policy is researched live, but rent and comps are still a bundled state-level sample, and the report labels that low confidence rather than hiding it. Owning that gap is stronger than being caught by it.</a:t>
             </a:r>
           </a:p>
           <a:p>
@@ -6895,23 +6900,23 @@
                 </a:solidFill>
                 <a:latin typeface="Segoe UI"/>
               </a:rPr>
+              <a:t>Rent and comps from a property-data API — today's market figures are a state-level sample, and the report says so.</a:t>
+            </a:r>
+          </a:p>
+          <a:p>
+            <a:pPr>
+              <a:spcAft>
+                <a:spcPts val="900"/>
+              </a:spcAft>
+            </a:pPr>
+            <a:r>
+              <a:rPr sz="1350" b="0">
+                <a:solidFill>
+                  <a:srgbClr val="1F2733"/>
+                </a:solidFill>
+                <a:latin typeface="Segoe UI"/>
+              </a:rPr>
               <a:t>OCR so scanned HOA declarations parse themselves.</a:t>
-            </a:r>
-          </a:p>
-          <a:p>
-            <a:pPr>
-              <a:spcAft>
-                <a:spcPts val="900"/>
-              </a:spcAft>
-            </a:pPr>
-            <a:r>
-              <a:rPr sz="1350" b="0">
-                <a:solidFill>
-                  <a:srgbClr val="1F2733"/>
-                </a:solidFill>
-                <a:latin typeface="Segoe UI"/>
-              </a:rPr>
-              <a:t>Comparison view across several candidate properties.</a:t>
             </a:r>
           </a:p>
           <a:p>

--- a/docs/submission/NorthStar-Presentation.pptx
+++ b/docs/submission/NorthStar-Presentation.pptx
@@ -978,7 +978,12 @@
           </a:p>
           <a:p>
             <a:r>
-              <a:t>If asked what you would build next, or about data sources, lead with the API item: policy is researched live, but rent and comps are still a bundled state-level sample, and the report labels that low confidence rather than hiding it. Owning that gap is stronger than being caught by it.</a:t>
+              <a:t>If asked what you would build next, or about data sources, lead with the market-data item: policy is researched live, but rent and comps are still a bundled state-level sample, and the report labels that low confidence rather than hiding it. Owning that gap is stronger than being caught by it.</a:t>
+            </a:r>
+          </a:p>
+          <a:p>
+            <a:r>
+              <a:t>If Redfin comes up specifically: they publish no public API, so the plan is their Data Center bulk files - free, aggregated, ZIP-level history - refreshed by a script, exactly the pattern we already use for the 41,488-ZIP GeoNames dataset. Scraping their internal endpoints would breach their terms and break on any frontend change, so it is not on the table. Per-property rent estimates would come from a rental-data API with real developer access.</a:t>
             </a:r>
           </a:p>
           <a:p>
@@ -6900,7 +6905,7 @@
                 </a:solidFill>
                 <a:latin typeface="Segoe UI"/>
               </a:rPr>
-              <a:t>Rent and comps from a property-data API — today's market figures are a state-level sample, and the report says so.</a:t>
+              <a:t>Real market data: Redfin Data Center for ZIP-level history, a rent API for per-property estimates. Today's figures are a state-level sample, and the report says so.</a:t>
             </a:r>
           </a:p>
           <a:p>
